--- a/docs/deck/MaxDock_introduction_v7.pptx
+++ b/docs/deck/MaxDock_introduction_v7.pptx
@@ -3713,13 +3713,6 @@
         <a:effectLst/>
       </p:bgPr>
     </p:bg>
-    <p:bg>
-      <p:bgPr>
-        <a:solidFill>
-          <a:srgbClr val="072238"/>
-        </a:solidFill>
-      </p:bgPr>
-    </p:bg>
     <p:spTree>
       <p:nvGrpSpPr>
         <p:cNvPr id="1" name=""/>
@@ -39555,13 +39548,6 @@
           <a:srgbClr val="0B1F33"/>
         </a:solidFill>
         <a:effectLst/>
-      </p:bgPr>
-    </p:bg>
-    <p:bg>
-      <p:bgPr>
-        <a:solidFill>
-          <a:srgbClr val="072238"/>
-        </a:solidFill>
       </p:bgPr>
     </p:bg>
     <p:spTree>
